--- a/clases/clase-4/presentacion.pptx
+++ b/clases/clase-4/presentacion.pptx
@@ -2581,7 +2581,7 @@
                 <a:ea typeface="Calibri" pitchFamily="34" charset="-122"/>
                 <a:cs typeface="Calibri" pitchFamily="34" charset="-120"/>
               </a:rPr>
-              <a:t>QUÉ LLEVARSE DE ESTA CLASE</a:t>
+              <a:t>CIERRE</a:t>
             </a:r>
             <a:endParaRPr lang="en-US" sz="1500" dirty="0"/>
           </a:p>
@@ -2620,7 +2620,7 @@
                 <a:ea typeface="Cambria" pitchFamily="34" charset="-122"/>
                 <a:cs typeface="Cambria" pitchFamily="34" charset="-120"/>
               </a:rPr>
-              <a:t>Qué llevarse de esta clase</a:t>
+              <a:t>Del SQL a mano al ORM</a:t>
             </a:r>
             <a:endParaRPr lang="en-US" sz="3000" dirty="0"/>
           </a:p>

--- a/clases/clase-4/presentacion.pptx
+++ b/clases/clase-4/presentacion.pptx
@@ -2050,8 +2050,8 @@
         </p:nvSpPr>
         <p:spPr>
           <a:xfrm>
-            <a:off x="822960" y="2377440"/>
-            <a:ext cx="1920240" cy="1920240"/>
+            <a:off x="1188720" y="2788920"/>
+            <a:ext cx="1097280" cy="1097280"/>
           </a:xfrm>
           <a:prstGeom prst="ellipse">
             <a:avLst/>
@@ -2075,8 +2075,8 @@
         </p:nvSpPr>
         <p:spPr>
           <a:xfrm>
-            <a:off x="822960" y="2880360"/>
-            <a:ext cx="1920240" cy="914400"/>
+            <a:off x="3200400" y="2423160"/>
+            <a:ext cx="8229600" cy="457200"/>
           </a:xfrm>
           <a:prstGeom prst="rect">
             <a:avLst/>
@@ -2088,105 +2088,66 @@
           <a:bodyPr wrap="square" lIns="0" tIns="0" rIns="0" bIns="0" rtlCol="0" anchor="ctr"/>
           <a:lstStyle/>
           <a:p>
-            <a:pPr algn="ctr" indent="0" marL="0">
+            <a:pPr indent="0" marL="0">
               <a:buNone/>
             </a:pPr>
             <a:r>
-              <a:rPr lang="en-US" sz="3000" b="1" dirty="0">
-                <a:solidFill>
-                  <a:srgbClr val="02C39A"/>
+              <a:rPr lang="en-US" sz="1500" b="1" spc="200" kern="0" dirty="0">
+                <a:solidFill>
+                  <a:srgbClr val="CFEDEA"/>
+                </a:solidFill>
+                <a:latin typeface="Calibri" pitchFamily="34" charset="0"/>
+                <a:ea typeface="Calibri" pitchFamily="34" charset="-122"/>
+                <a:cs typeface="Calibri" pitchFamily="34" charset="-120"/>
+              </a:rPr>
+              <a:t>BLOQUE 4</a:t>
+            </a:r>
+            <a:endParaRPr lang="en-US" sz="1500" dirty="0"/>
+          </a:p>
+        </p:txBody>
+      </p:sp>
+      <p:sp>
+        <p:nvSpPr>
+          <p:cNvPr id="4" name="Text 2"/>
+          <p:cNvSpPr txBox="1"/>
+          <p:nvPr/>
+        </p:nvSpPr>
+        <p:spPr>
+          <a:xfrm>
+            <a:off x="3200400" y="2834640"/>
+            <a:ext cx="8229600" cy="1280160"/>
+          </a:xfrm>
+          <a:prstGeom prst="rect">
+            <a:avLst/>
+          </a:prstGeom>
+          <a:noFill/>
+          <a:ln/>
+        </p:spPr>
+        <p:txBody>
+          <a:bodyPr wrap="square" lIns="0" tIns="0" rIns="0" bIns="0" rtlCol="0" anchor="ctr"/>
+          <a:lstStyle/>
+          <a:p>
+            <a:pPr indent="0" marL="0">
+              <a:buNone/>
+            </a:pPr>
+            <a:r>
+              <a:rPr lang="en-US" sz="3200" b="1" dirty="0">
+                <a:solidFill>
+                  <a:srgbClr val="FFFFFF"/>
                 </a:solidFill>
                 <a:latin typeface="Cambria" pitchFamily="34" charset="0"/>
                 <a:ea typeface="Cambria" pitchFamily="34" charset="-122"/>
                 <a:cs typeface="Cambria" pitchFamily="34" charset="-120"/>
               </a:rPr>
-              <a:t>15’</a:t>
-            </a:r>
-            <a:endParaRPr lang="en-US" sz="3000" dirty="0"/>
-          </a:p>
-        </p:txBody>
-      </p:sp>
-      <p:sp>
-        <p:nvSpPr>
-          <p:cNvPr id="4" name="Text 2"/>
-          <p:cNvSpPr txBox="1"/>
-          <p:nvPr/>
-        </p:nvSpPr>
-        <p:spPr>
-          <a:xfrm>
-            <a:off x="3200400" y="2423160"/>
-            <a:ext cx="8229600" cy="457200"/>
-          </a:xfrm>
-          <a:prstGeom prst="rect">
-            <a:avLst/>
-          </a:prstGeom>
-          <a:noFill/>
-          <a:ln/>
-        </p:spPr>
-        <p:txBody>
-          <a:bodyPr wrap="square" lIns="0" tIns="0" rIns="0" bIns="0" rtlCol="0" anchor="ctr"/>
-          <a:lstStyle/>
-          <a:p>
-            <a:pPr indent="0" marL="0">
-              <a:buNone/>
-            </a:pPr>
-            <a:r>
-              <a:rPr lang="en-US" sz="1500" b="1" spc="200" kern="0" dirty="0">
-                <a:solidFill>
-                  <a:srgbClr val="CFEDEA"/>
-                </a:solidFill>
-                <a:latin typeface="Calibri" pitchFamily="34" charset="0"/>
-                <a:ea typeface="Calibri" pitchFamily="34" charset="-122"/>
-                <a:cs typeface="Calibri" pitchFamily="34" charset="-120"/>
-              </a:rPr>
-              <a:t>BLOQUE 4</a:t>
-            </a:r>
-            <a:endParaRPr lang="en-US" sz="1500" dirty="0"/>
+              <a:t>Buffer de dudas y troubleshooting</a:t>
+            </a:r>
+            <a:endParaRPr lang="en-US" sz="3200" dirty="0"/>
           </a:p>
         </p:txBody>
       </p:sp>
       <p:sp>
         <p:nvSpPr>
           <p:cNvPr id="5" name="Text 3"/>
-          <p:cNvSpPr txBox="1"/>
-          <p:nvPr/>
-        </p:nvSpPr>
-        <p:spPr>
-          <a:xfrm>
-            <a:off x="3200400" y="2834640"/>
-            <a:ext cx="8229600" cy="1280160"/>
-          </a:xfrm>
-          <a:prstGeom prst="rect">
-            <a:avLst/>
-          </a:prstGeom>
-          <a:noFill/>
-          <a:ln/>
-        </p:spPr>
-        <p:txBody>
-          <a:bodyPr wrap="square" lIns="0" tIns="0" rIns="0" bIns="0" rtlCol="0" anchor="ctr"/>
-          <a:lstStyle/>
-          <a:p>
-            <a:pPr indent="0" marL="0">
-              <a:buNone/>
-            </a:pPr>
-            <a:r>
-              <a:rPr lang="en-US" sz="3200" b="1" dirty="0">
-                <a:solidFill>
-                  <a:srgbClr val="FFFFFF"/>
-                </a:solidFill>
-                <a:latin typeface="Cambria" pitchFamily="34" charset="0"/>
-                <a:ea typeface="Cambria" pitchFamily="34" charset="-122"/>
-                <a:cs typeface="Cambria" pitchFamily="34" charset="-120"/>
-              </a:rPr>
-              <a:t>Buffer de dudas y troubleshooting</a:t>
-            </a:r>
-            <a:endParaRPr lang="en-US" sz="3200" dirty="0"/>
-          </a:p>
-        </p:txBody>
-      </p:sp>
-      <p:sp>
-        <p:nvSpPr>
-          <p:cNvPr id="6" name="Text 4"/>
           <p:cNvSpPr txBox="1"/>
           <p:nvPr/>
         </p:nvSpPr>
@@ -2264,7 +2225,7 @@
         <p:spPr>
           <a:xfrm>
             <a:off x="640080" y="502920"/>
-            <a:ext cx="2743200" cy="502920"/>
+            <a:ext cx="1737360" cy="502920"/>
           </a:xfrm>
           <a:prstGeom prst="roundRect">
             <a:avLst>
@@ -2286,7 +2247,7 @@
         <p:spPr>
           <a:xfrm>
             <a:off x="640080" y="502920"/>
-            <a:ext cx="2743200" cy="502920"/>
+            <a:ext cx="1737360" cy="502920"/>
           </a:xfrm>
           <a:prstGeom prst="rect">
             <a:avLst/>
@@ -2310,7 +2271,7 @@
                 <a:ea typeface="Calibri" pitchFamily="34" charset="-122"/>
                 <a:cs typeface="Calibri" pitchFamily="34" charset="-120"/>
               </a:rPr>
-              <a:t>EJERCICIO · 1h55</a:t>
+              <a:t>EJERCICIO</a:t>
             </a:r>
             <a:endParaRPr lang="en-US" sz="1300" dirty="0"/>
           </a:p>
@@ -2988,8 +2949,8 @@
         </p:nvSpPr>
         <p:spPr>
           <a:xfrm>
-            <a:off x="822960" y="2377440"/>
-            <a:ext cx="1920240" cy="1920240"/>
+            <a:off x="1188720" y="2788920"/>
+            <a:ext cx="1097280" cy="1097280"/>
           </a:xfrm>
           <a:prstGeom prst="ellipse">
             <a:avLst/>
@@ -3013,45 +2974,6 @@
         </p:nvSpPr>
         <p:spPr>
           <a:xfrm>
-            <a:off x="822960" y="2880360"/>
-            <a:ext cx="1920240" cy="914400"/>
-          </a:xfrm>
-          <a:prstGeom prst="rect">
-            <a:avLst/>
-          </a:prstGeom>
-          <a:noFill/>
-          <a:ln/>
-        </p:spPr>
-        <p:txBody>
-          <a:bodyPr wrap="square" lIns="0" tIns="0" rIns="0" bIns="0" rtlCol="0" anchor="ctr"/>
-          <a:lstStyle/>
-          <a:p>
-            <a:pPr algn="ctr" indent="0" marL="0">
-              <a:buNone/>
-            </a:pPr>
-            <a:r>
-              <a:rPr lang="en-US" sz="3000" b="1" dirty="0">
-                <a:solidFill>
-                  <a:srgbClr val="02C39A"/>
-                </a:solidFill>
-                <a:latin typeface="Cambria" pitchFamily="34" charset="0"/>
-                <a:ea typeface="Cambria" pitchFamily="34" charset="-122"/>
-                <a:cs typeface="Cambria" pitchFamily="34" charset="-120"/>
-              </a:rPr>
-              <a:t>25’</a:t>
-            </a:r>
-            <a:endParaRPr lang="en-US" sz="3000" dirty="0"/>
-          </a:p>
-        </p:txBody>
-      </p:sp>
-      <p:sp>
-        <p:nvSpPr>
-          <p:cNvPr id="4" name="Text 2"/>
-          <p:cNvSpPr txBox="1"/>
-          <p:nvPr/>
-        </p:nvSpPr>
-        <p:spPr>
-          <a:xfrm>
             <a:off x="3200400" y="2423160"/>
             <a:ext cx="8229600" cy="457200"/>
           </a:xfrm>
@@ -3085,7 +3007,7 @@
       </p:sp>
       <p:sp>
         <p:nvSpPr>
-          <p:cNvPr id="5" name="Text 3"/>
+          <p:cNvPr id="4" name="Text 2"/>
           <p:cNvSpPr txBox="1"/>
           <p:nvPr/>
         </p:nvSpPr>
@@ -3566,8 +3488,8 @@
         </p:nvSpPr>
         <p:spPr>
           <a:xfrm>
-            <a:off x="822960" y="2377440"/>
-            <a:ext cx="1920240" cy="1920240"/>
+            <a:off x="1188720" y="2788920"/>
+            <a:ext cx="1097280" cy="1097280"/>
           </a:xfrm>
           <a:prstGeom prst="ellipse">
             <a:avLst/>
@@ -3591,45 +3513,6 @@
         </p:nvSpPr>
         <p:spPr>
           <a:xfrm>
-            <a:off x="822960" y="2880360"/>
-            <a:ext cx="1920240" cy="914400"/>
-          </a:xfrm>
-          <a:prstGeom prst="rect">
-            <a:avLst/>
-          </a:prstGeom>
-          <a:noFill/>
-          <a:ln/>
-        </p:spPr>
-        <p:txBody>
-          <a:bodyPr wrap="square" lIns="0" tIns="0" rIns="0" bIns="0" rtlCol="0" anchor="ctr"/>
-          <a:lstStyle/>
-          <a:p>
-            <a:pPr algn="ctr" indent="0" marL="0">
-              <a:buNone/>
-            </a:pPr>
-            <a:r>
-              <a:rPr lang="en-US" sz="3000" b="1" dirty="0">
-                <a:solidFill>
-                  <a:srgbClr val="02C39A"/>
-                </a:solidFill>
-                <a:latin typeface="Cambria" pitchFamily="34" charset="0"/>
-                <a:ea typeface="Cambria" pitchFamily="34" charset="-122"/>
-                <a:cs typeface="Cambria" pitchFamily="34" charset="-120"/>
-              </a:rPr>
-              <a:t>30’</a:t>
-            </a:r>
-            <a:endParaRPr lang="en-US" sz="3000" dirty="0"/>
-          </a:p>
-        </p:txBody>
-      </p:sp>
-      <p:sp>
-        <p:nvSpPr>
-          <p:cNvPr id="4" name="Text 2"/>
-          <p:cNvSpPr txBox="1"/>
-          <p:nvPr/>
-        </p:nvSpPr>
-        <p:spPr>
-          <a:xfrm>
             <a:off x="3200400" y="2423160"/>
             <a:ext cx="8229600" cy="457200"/>
           </a:xfrm>
@@ -3663,7 +3546,7 @@
       </p:sp>
       <p:sp>
         <p:nvSpPr>
-          <p:cNvPr id="5" name="Text 3"/>
+          <p:cNvPr id="4" name="Text 2"/>
           <p:cNvSpPr txBox="1"/>
           <p:nvPr/>
         </p:nvSpPr>
@@ -3962,7 +3845,7 @@
                 <a:ea typeface="Calibri" pitchFamily="34" charset="-122"/>
                 <a:cs typeface="Calibri" pitchFamily="34" charset="-120"/>
               </a:rPr>
-              <a:t>PREGUNTA ABIERTA · 15’ INVESTIGAN + 10’ PUESTA EN COMÚN</a:t>
+              <a:t>PREGUNTA ABIERTA</a:t>
             </a:r>
             <a:endParaRPr lang="en-US" sz="1500" dirty="0"/>
           </a:p>
@@ -4190,8 +4073,8 @@
         </p:nvSpPr>
         <p:spPr>
           <a:xfrm>
-            <a:off x="822960" y="2377440"/>
-            <a:ext cx="1920240" cy="1920240"/>
+            <a:off x="1188720" y="2788920"/>
+            <a:ext cx="1097280" cy="1097280"/>
           </a:xfrm>
           <a:prstGeom prst="ellipse">
             <a:avLst/>
@@ -4215,45 +4098,6 @@
         </p:nvSpPr>
         <p:spPr>
           <a:xfrm>
-            <a:off x="822960" y="2880360"/>
-            <a:ext cx="1920240" cy="914400"/>
-          </a:xfrm>
-          <a:prstGeom prst="rect">
-            <a:avLst/>
-          </a:prstGeom>
-          <a:noFill/>
-          <a:ln/>
-        </p:spPr>
-        <p:txBody>
-          <a:bodyPr wrap="square" lIns="0" tIns="0" rIns="0" bIns="0" rtlCol="0" anchor="ctr"/>
-          <a:lstStyle/>
-          <a:p>
-            <a:pPr algn="ctr" indent="0" marL="0">
-              <a:buNone/>
-            </a:pPr>
-            <a:r>
-              <a:rPr lang="en-US" sz="3000" b="1" dirty="0">
-                <a:solidFill>
-                  <a:srgbClr val="02C39A"/>
-                </a:solidFill>
-                <a:latin typeface="Cambria" pitchFamily="34" charset="0"/>
-                <a:ea typeface="Cambria" pitchFamily="34" charset="-122"/>
-                <a:cs typeface="Cambria" pitchFamily="34" charset="-120"/>
-              </a:rPr>
-              <a:t>30’</a:t>
-            </a:r>
-            <a:endParaRPr lang="en-US" sz="3000" dirty="0"/>
-          </a:p>
-        </p:txBody>
-      </p:sp>
-      <p:sp>
-        <p:nvSpPr>
-          <p:cNvPr id="4" name="Text 2"/>
-          <p:cNvSpPr txBox="1"/>
-          <p:nvPr/>
-        </p:nvSpPr>
-        <p:spPr>
-          <a:xfrm>
             <a:off x="3200400" y="2423160"/>
             <a:ext cx="8229600" cy="457200"/>
           </a:xfrm>
@@ -4287,7 +4131,7 @@
       </p:sp>
       <p:sp>
         <p:nvSpPr>
-          <p:cNvPr id="5" name="Text 3"/>
+          <p:cNvPr id="4" name="Text 2"/>
           <p:cNvSpPr txBox="1"/>
           <p:nvPr/>
         </p:nvSpPr>
